--- a/flowchart.pptx
+++ b/flowchart.pptx
@@ -245,7 +245,7 @@
           <a:p>
             <a:fld id="{F838E322-D2FC-CC4F-848A-FCF73E35E421}" type="datetimeFigureOut">
               <a:rPr lang="en-US" smtClean="0"/>
-              <a:t>3/6/26</a:t>
+              <a:t>3/8/26</a:t>
             </a:fld>
             <a:endParaRPr lang="en-US"/>
           </a:p>
@@ -415,7 +415,7 @@
           <a:p>
             <a:fld id="{F838E322-D2FC-CC4F-848A-FCF73E35E421}" type="datetimeFigureOut">
               <a:rPr lang="en-US" smtClean="0"/>
-              <a:t>3/6/26</a:t>
+              <a:t>3/8/26</a:t>
             </a:fld>
             <a:endParaRPr lang="en-US"/>
           </a:p>
@@ -595,7 +595,7 @@
           <a:p>
             <a:fld id="{F838E322-D2FC-CC4F-848A-FCF73E35E421}" type="datetimeFigureOut">
               <a:rPr lang="en-US" smtClean="0"/>
-              <a:t>3/6/26</a:t>
+              <a:t>3/8/26</a:t>
             </a:fld>
             <a:endParaRPr lang="en-US"/>
           </a:p>
@@ -765,7 +765,7 @@
           <a:p>
             <a:fld id="{F838E322-D2FC-CC4F-848A-FCF73E35E421}" type="datetimeFigureOut">
               <a:rPr lang="en-US" smtClean="0"/>
-              <a:t>3/6/26</a:t>
+              <a:t>3/8/26</a:t>
             </a:fld>
             <a:endParaRPr lang="en-US"/>
           </a:p>
@@ -1011,7 +1011,7 @@
           <a:p>
             <a:fld id="{F838E322-D2FC-CC4F-848A-FCF73E35E421}" type="datetimeFigureOut">
               <a:rPr lang="en-US" smtClean="0"/>
-              <a:t>3/6/26</a:t>
+              <a:t>3/8/26</a:t>
             </a:fld>
             <a:endParaRPr lang="en-US"/>
           </a:p>
@@ -1243,7 +1243,7 @@
           <a:p>
             <a:fld id="{F838E322-D2FC-CC4F-848A-FCF73E35E421}" type="datetimeFigureOut">
               <a:rPr lang="en-US" smtClean="0"/>
-              <a:t>3/6/26</a:t>
+              <a:t>3/8/26</a:t>
             </a:fld>
             <a:endParaRPr lang="en-US"/>
           </a:p>
@@ -1610,7 +1610,7 @@
           <a:p>
             <a:fld id="{F838E322-D2FC-CC4F-848A-FCF73E35E421}" type="datetimeFigureOut">
               <a:rPr lang="en-US" smtClean="0"/>
-              <a:t>3/6/26</a:t>
+              <a:t>3/8/26</a:t>
             </a:fld>
             <a:endParaRPr lang="en-US"/>
           </a:p>
@@ -1728,7 +1728,7 @@
           <a:p>
             <a:fld id="{F838E322-D2FC-CC4F-848A-FCF73E35E421}" type="datetimeFigureOut">
               <a:rPr lang="en-US" smtClean="0"/>
-              <a:t>3/6/26</a:t>
+              <a:t>3/8/26</a:t>
             </a:fld>
             <a:endParaRPr lang="en-US"/>
           </a:p>
@@ -1823,7 +1823,7 @@
           <a:p>
             <a:fld id="{F838E322-D2FC-CC4F-848A-FCF73E35E421}" type="datetimeFigureOut">
               <a:rPr lang="en-US" smtClean="0"/>
-              <a:t>3/6/26</a:t>
+              <a:t>3/8/26</a:t>
             </a:fld>
             <a:endParaRPr lang="en-US"/>
           </a:p>
@@ -2100,7 +2100,7 @@
           <a:p>
             <a:fld id="{F838E322-D2FC-CC4F-848A-FCF73E35E421}" type="datetimeFigureOut">
               <a:rPr lang="en-US" smtClean="0"/>
-              <a:t>3/6/26</a:t>
+              <a:t>3/8/26</a:t>
             </a:fld>
             <a:endParaRPr lang="en-US"/>
           </a:p>
@@ -2357,7 +2357,7 @@
           <a:p>
             <a:fld id="{F838E322-D2FC-CC4F-848A-FCF73E35E421}" type="datetimeFigureOut">
               <a:rPr lang="en-US" smtClean="0"/>
-              <a:t>3/6/26</a:t>
+              <a:t>3/8/26</a:t>
             </a:fld>
             <a:endParaRPr lang="en-US"/>
           </a:p>
@@ -2570,7 +2570,7 @@
           <a:p>
             <a:fld id="{F838E322-D2FC-CC4F-848A-FCF73E35E421}" type="datetimeFigureOut">
               <a:rPr lang="en-US" smtClean="0"/>
-              <a:t>3/6/26</a:t>
+              <a:t>3/8/26</a:t>
             </a:fld>
             <a:endParaRPr lang="en-US"/>
           </a:p>
@@ -3629,10 +3629,10 @@
       </p:sp>
       <p:sp>
         <p:nvSpPr>
-          <p:cNvPr id="30" name="Decision 29">
-            <a:extLst>
-              <a:ext uri="{FF2B5EF4-FFF2-40B4-BE49-F238E27FC236}">
-                <a16:creationId xmlns:a16="http://schemas.microsoft.com/office/drawing/2014/main" id="{03EEAA70-9C11-03C2-DD90-5C38F811E2AF}"/>
+          <p:cNvPr id="32" name="Data 31">
+            <a:extLst>
+              <a:ext uri="{FF2B5EF4-FFF2-40B4-BE49-F238E27FC236}">
+                <a16:creationId xmlns:a16="http://schemas.microsoft.com/office/drawing/2014/main" id="{9B74F60C-A019-8A20-C482-1A7AD021D43E}"/>
               </a:ext>
             </a:extLst>
           </p:cNvPr>
@@ -3641,56 +3641,7 @@
         </p:nvSpPr>
         <p:spPr>
           <a:xfrm>
-            <a:off x="936820" y="8397191"/>
-            <a:ext cx="1987663" cy="887143"/>
-          </a:xfrm>
-          <a:prstGeom prst="flowChartDecision">
-            <a:avLst/>
-          </a:prstGeom>
-        </p:spPr>
-        <p:style>
-          <a:lnRef idx="2">
-            <a:schemeClr val="accent2">
-              <a:shade val="15000"/>
-            </a:schemeClr>
-          </a:lnRef>
-          <a:fillRef idx="1">
-            <a:schemeClr val="accent2"/>
-          </a:fillRef>
-          <a:effectRef idx="0">
-            <a:schemeClr val="accent2"/>
-          </a:effectRef>
-          <a:fontRef idx="minor">
-            <a:schemeClr val="lt1"/>
-          </a:fontRef>
-        </p:style>
-        <p:txBody>
-          <a:bodyPr rtlCol="0" anchor="ctr"/>
-          <a:lstStyle/>
-          <a:p>
-            <a:pPr algn="ctr"/>
-            <a:r>
-              <a:rPr lang="en-US" sz="1200" dirty="0"/>
-              <a:t>Download Successful?</a:t>
-            </a:r>
-          </a:p>
-        </p:txBody>
-      </p:sp>
-      <p:sp>
-        <p:nvSpPr>
-          <p:cNvPr id="32" name="Data 31">
-            <a:extLst>
-              <a:ext uri="{FF2B5EF4-FFF2-40B4-BE49-F238E27FC236}">
-                <a16:creationId xmlns:a16="http://schemas.microsoft.com/office/drawing/2014/main" id="{9B74F60C-A019-8A20-C482-1A7AD021D43E}"/>
-              </a:ext>
-            </a:extLst>
-          </p:cNvPr>
-          <p:cNvSpPr/>
-          <p:nvPr/>
-        </p:nvSpPr>
-        <p:spPr>
-          <a:xfrm>
-            <a:off x="902489" y="9528594"/>
+            <a:off x="908839" y="8448261"/>
             <a:ext cx="2056327" cy="558003"/>
           </a:xfrm>
           <a:prstGeom prst="flowChartInputOutput">
@@ -4172,6 +4123,7 @@
             </a:extLst>
           </p:cNvPr>
           <p:cNvCxnSpPr>
+            <a:cxnSpLocks/>
             <a:stCxn id="28" idx="4"/>
             <a:endCxn id="12" idx="0"/>
           </p:cNvCxnSpPr>
@@ -4218,7 +4170,7 @@
         </p:nvSpPr>
         <p:spPr>
           <a:xfrm>
-            <a:off x="3866154" y="9478694"/>
+            <a:off x="1183644" y="9473198"/>
             <a:ext cx="1491727" cy="648597"/>
           </a:xfrm>
           <a:prstGeom prst="ellipse">
@@ -4308,6 +4260,7 @@
             </a:extLst>
           </p:cNvPr>
           <p:cNvCxnSpPr>
+            <a:cxnSpLocks/>
             <a:stCxn id="22" idx="1"/>
             <a:endCxn id="28" idx="1"/>
           </p:cNvCxnSpPr>
@@ -4320,97 +4273,6 @@
           </a:xfrm>
           <a:prstGeom prst="bentConnector2">
             <a:avLst/>
-          </a:prstGeom>
-          <a:ln>
-            <a:tailEnd type="triangle"/>
-          </a:ln>
-        </p:spPr>
-        <p:style>
-          <a:lnRef idx="2">
-            <a:schemeClr val="accent1"/>
-          </a:lnRef>
-          <a:fillRef idx="0">
-            <a:schemeClr val="accent1"/>
-          </a:fillRef>
-          <a:effectRef idx="1">
-            <a:schemeClr val="accent1"/>
-          </a:effectRef>
-          <a:fontRef idx="minor">
-            <a:schemeClr val="tx1"/>
-          </a:fontRef>
-        </p:style>
-      </p:cxnSp>
-      <p:cxnSp>
-        <p:nvCxnSpPr>
-          <p:cNvPr id="190" name="Elbow Connector 189">
-            <a:extLst>
-              <a:ext uri="{FF2B5EF4-FFF2-40B4-BE49-F238E27FC236}">
-                <a16:creationId xmlns:a16="http://schemas.microsoft.com/office/drawing/2014/main" id="{8C8A4DC5-7CB9-7546-5B45-11DDD07F539F}"/>
-              </a:ext>
-            </a:extLst>
-          </p:cNvPr>
-          <p:cNvCxnSpPr>
-            <a:cxnSpLocks/>
-            <a:stCxn id="30" idx="1"/>
-            <a:endCxn id="12" idx="1"/>
-          </p:cNvCxnSpPr>
-          <p:nvPr/>
-        </p:nvCxnSpPr>
-        <p:spPr>
-          <a:xfrm rot="10800000" flipH="1">
-            <a:off x="936820" y="7873929"/>
-            <a:ext cx="278296" cy="966835"/>
-          </a:xfrm>
-          <a:prstGeom prst="bentConnector3">
-            <a:avLst>
-              <a:gd name="adj1" fmla="val -162282"/>
-            </a:avLst>
-          </a:prstGeom>
-          <a:ln>
-            <a:tailEnd type="triangle"/>
-          </a:ln>
-        </p:spPr>
-        <p:style>
-          <a:lnRef idx="2">
-            <a:schemeClr val="accent1"/>
-          </a:lnRef>
-          <a:fillRef idx="0">
-            <a:schemeClr val="accent1"/>
-          </a:fillRef>
-          <a:effectRef idx="1">
-            <a:schemeClr val="accent1"/>
-          </a:effectRef>
-          <a:fontRef idx="minor">
-            <a:schemeClr val="tx1"/>
-          </a:fontRef>
-        </p:style>
-      </p:cxnSp>
-      <p:cxnSp>
-        <p:nvCxnSpPr>
-          <p:cNvPr id="194" name="Elbow Connector 193">
-            <a:extLst>
-              <a:ext uri="{FF2B5EF4-FFF2-40B4-BE49-F238E27FC236}">
-                <a16:creationId xmlns:a16="http://schemas.microsoft.com/office/drawing/2014/main" id="{5A24668A-3227-944C-61F7-A6FD6DEF2F9E}"/>
-              </a:ext>
-            </a:extLst>
-          </p:cNvPr>
-          <p:cNvCxnSpPr>
-            <a:cxnSpLocks/>
-            <a:stCxn id="30" idx="3"/>
-            <a:endCxn id="23" idx="0"/>
-          </p:cNvCxnSpPr>
-          <p:nvPr/>
-        </p:nvCxnSpPr>
-        <p:spPr>
-          <a:xfrm flipV="1">
-            <a:off x="2924483" y="8072431"/>
-            <a:ext cx="3381195" cy="768332"/>
-          </a:xfrm>
-          <a:prstGeom prst="bentConnector4">
-            <a:avLst>
-              <a:gd name="adj1" fmla="val 39919"/>
-              <a:gd name="adj2" fmla="val 129753"/>
-            </a:avLst>
           </a:prstGeom>
           <a:ln>
             <a:tailEnd type="triangle"/>
@@ -4443,56 +4305,13 @@
           <p:cNvCxnSpPr>
             <a:cxnSpLocks/>
             <a:stCxn id="12" idx="2"/>
-            <a:endCxn id="30" idx="0"/>
           </p:cNvCxnSpPr>
           <p:nvPr/>
         </p:nvCxnSpPr>
         <p:spPr>
           <a:xfrm>
             <a:off x="1929509" y="8148248"/>
-            <a:ext cx="1143" cy="248943"/>
-          </a:xfrm>
-          <a:prstGeom prst="straightConnector1">
-            <a:avLst/>
-          </a:prstGeom>
-          <a:ln>
-            <a:tailEnd type="triangle"/>
-          </a:ln>
-        </p:spPr>
-        <p:style>
-          <a:lnRef idx="2">
-            <a:schemeClr val="accent1"/>
-          </a:lnRef>
-          <a:fillRef idx="0">
-            <a:schemeClr val="accent1"/>
-          </a:fillRef>
-          <a:effectRef idx="1">
-            <a:schemeClr val="accent1"/>
-          </a:effectRef>
-          <a:fontRef idx="minor">
-            <a:schemeClr val="tx1"/>
-          </a:fontRef>
-        </p:style>
-      </p:cxnSp>
-      <p:cxnSp>
-        <p:nvCxnSpPr>
-          <p:cNvPr id="217" name="Straight Arrow Connector 216">
-            <a:extLst>
-              <a:ext uri="{FF2B5EF4-FFF2-40B4-BE49-F238E27FC236}">
-                <a16:creationId xmlns:a16="http://schemas.microsoft.com/office/drawing/2014/main" id="{18691841-9806-B465-E61E-EBA518236B42}"/>
-              </a:ext>
-            </a:extLst>
-          </p:cNvPr>
-          <p:cNvCxnSpPr>
-            <a:stCxn id="30" idx="2"/>
-            <a:endCxn id="32" idx="1"/>
-          </p:cNvCxnSpPr>
-          <p:nvPr/>
-        </p:nvCxnSpPr>
-        <p:spPr>
-          <a:xfrm>
-            <a:off x="1930652" y="9284334"/>
-            <a:ext cx="1" cy="244260"/>
+            <a:ext cx="7494" cy="300013"/>
           </a:xfrm>
           <a:prstGeom prst="straightConnector1">
             <a:avLst/>
@@ -4527,15 +4346,15 @@
           </p:cNvPr>
           <p:cNvCxnSpPr>
             <a:cxnSpLocks/>
-            <a:stCxn id="32" idx="5"/>
-            <a:endCxn id="100" idx="2"/>
+            <a:stCxn id="32" idx="4"/>
+            <a:endCxn id="100" idx="0"/>
           </p:cNvCxnSpPr>
           <p:nvPr/>
         </p:nvCxnSpPr>
         <p:spPr>
-          <a:xfrm flipV="1">
-            <a:off x="2753183" y="9802993"/>
-            <a:ext cx="1112971" cy="4603"/>
+          <a:xfrm flipH="1">
+            <a:off x="1929508" y="9006264"/>
+            <a:ext cx="7495" cy="466934"/>
           </a:xfrm>
           <a:prstGeom prst="straightConnector1">
             <a:avLst/>
@@ -4672,142 +4491,6 @@
             <a:r>
               <a:rPr lang="en-US" sz="1200" dirty="0"/>
               <a:t>False</a:t>
-            </a:r>
-          </a:p>
-        </p:txBody>
-      </p:sp>
-      <p:sp>
-        <p:nvSpPr>
-          <p:cNvPr id="239" name="TextBox 238">
-            <a:extLst>
-              <a:ext uri="{FF2B5EF4-FFF2-40B4-BE49-F238E27FC236}">
-                <a16:creationId xmlns:a16="http://schemas.microsoft.com/office/drawing/2014/main" id="{6879B6E3-517B-98C5-7CA1-6B24C1687B16}"/>
-              </a:ext>
-            </a:extLst>
-          </p:cNvPr>
-          <p:cNvSpPr txBox="1"/>
-          <p:nvPr/>
-        </p:nvSpPr>
-        <p:spPr>
-          <a:xfrm>
-            <a:off x="199020" y="8616787"/>
-            <a:ext cx="1034689" cy="438582"/>
-          </a:xfrm>
-          <a:prstGeom prst="rect">
-            <a:avLst/>
-          </a:prstGeom>
-          <a:noFill/>
-        </p:spPr>
-        <p:txBody>
-          <a:bodyPr wrap="square" rtlCol="0">
-            <a:spAutoFit/>
-          </a:bodyPr>
-          <a:lstStyle/>
-          <a:p>
-            <a:pPr algn="ctr"/>
-            <a:r>
-              <a:rPr lang="en-US" sz="1200" dirty="0"/>
-              <a:t>False</a:t>
-            </a:r>
-          </a:p>
-          <a:p>
-            <a:r>
-              <a:rPr lang="en-US" sz="1000" dirty="0"/>
-              <a:t>(1</a:t>
-            </a:r>
-            <a:r>
-              <a:rPr lang="en-US" sz="1000" baseline="30000" dirty="0"/>
-              <a:t>st</a:t>
-            </a:r>
-            <a:r>
-              <a:rPr lang="en-US" sz="1000" dirty="0"/>
-              <a:t> attempt)</a:t>
-            </a:r>
-          </a:p>
-        </p:txBody>
-      </p:sp>
-      <p:sp>
-        <p:nvSpPr>
-          <p:cNvPr id="240" name="TextBox 239">
-            <a:extLst>
-              <a:ext uri="{FF2B5EF4-FFF2-40B4-BE49-F238E27FC236}">
-                <a16:creationId xmlns:a16="http://schemas.microsoft.com/office/drawing/2014/main" id="{069615A5-00F0-0CF0-DD9B-D5F792DBF209}"/>
-              </a:ext>
-            </a:extLst>
-          </p:cNvPr>
-          <p:cNvSpPr txBox="1"/>
-          <p:nvPr/>
-        </p:nvSpPr>
-        <p:spPr>
-          <a:xfrm>
-            <a:off x="1929508" y="9251595"/>
-            <a:ext cx="471091" cy="276999"/>
-          </a:xfrm>
-          <a:prstGeom prst="rect">
-            <a:avLst/>
-          </a:prstGeom>
-          <a:noFill/>
-        </p:spPr>
-        <p:txBody>
-          <a:bodyPr wrap="none" rtlCol="0">
-            <a:spAutoFit/>
-          </a:bodyPr>
-          <a:lstStyle/>
-          <a:p>
-            <a:r>
-              <a:rPr lang="en-US" sz="1200" dirty="0"/>
-              <a:t>True</a:t>
-            </a:r>
-          </a:p>
-        </p:txBody>
-      </p:sp>
-      <p:sp>
-        <p:nvSpPr>
-          <p:cNvPr id="241" name="TextBox 240">
-            <a:extLst>
-              <a:ext uri="{FF2B5EF4-FFF2-40B4-BE49-F238E27FC236}">
-                <a16:creationId xmlns:a16="http://schemas.microsoft.com/office/drawing/2014/main" id="{49C03709-0133-1DAD-BBAE-3BBDE903BA16}"/>
-              </a:ext>
-            </a:extLst>
-          </p:cNvPr>
-          <p:cNvSpPr txBox="1"/>
-          <p:nvPr/>
-        </p:nvSpPr>
-        <p:spPr>
-          <a:xfrm>
-            <a:off x="2605737" y="8623358"/>
-            <a:ext cx="1112971" cy="438582"/>
-          </a:xfrm>
-          <a:prstGeom prst="rect">
-            <a:avLst/>
-          </a:prstGeom>
-          <a:noFill/>
-        </p:spPr>
-        <p:txBody>
-          <a:bodyPr wrap="square" rtlCol="0">
-            <a:spAutoFit/>
-          </a:bodyPr>
-          <a:lstStyle/>
-          <a:p>
-            <a:pPr algn="ctr"/>
-            <a:r>
-              <a:rPr lang="en-US" sz="1200" dirty="0"/>
-              <a:t>False </a:t>
-            </a:r>
-          </a:p>
-          <a:p>
-            <a:pPr algn="r"/>
-            <a:r>
-              <a:rPr lang="en-US" sz="1000" dirty="0"/>
-              <a:t>(2</a:t>
-            </a:r>
-            <a:r>
-              <a:rPr lang="en-US" sz="1000" baseline="30000" dirty="0"/>
-              <a:t>nd</a:t>
-            </a:r>
-            <a:r>
-              <a:rPr lang="en-US" sz="1000" dirty="0"/>
-              <a:t> attempt)</a:t>
             </a:r>
           </a:p>
         </p:txBody>
@@ -8510,55 +8193,6 @@
       </p:sp>
       <p:sp>
         <p:nvSpPr>
-          <p:cNvPr id="8" name="Oval 7">
-            <a:extLst>
-              <a:ext uri="{FF2B5EF4-FFF2-40B4-BE49-F238E27FC236}">
-                <a16:creationId xmlns:a16="http://schemas.microsoft.com/office/drawing/2014/main" id="{FF499DB7-BA1D-03BA-D416-0BF70EE5EA25}"/>
-              </a:ext>
-            </a:extLst>
-          </p:cNvPr>
-          <p:cNvSpPr/>
-          <p:nvPr/>
-        </p:nvSpPr>
-        <p:spPr>
-          <a:xfrm>
-            <a:off x="3901544" y="8197416"/>
-            <a:ext cx="2122515" cy="430688"/>
-          </a:xfrm>
-          <a:prstGeom prst="ellipse">
-            <a:avLst/>
-          </a:prstGeom>
-        </p:spPr>
-        <p:style>
-          <a:lnRef idx="2">
-            <a:schemeClr val="accent6">
-              <a:shade val="15000"/>
-            </a:schemeClr>
-          </a:lnRef>
-          <a:fillRef idx="1">
-            <a:schemeClr val="accent6"/>
-          </a:fillRef>
-          <a:effectRef idx="0">
-            <a:schemeClr val="accent6"/>
-          </a:effectRef>
-          <a:fontRef idx="minor">
-            <a:schemeClr val="lt1"/>
-          </a:fontRef>
-        </p:style>
-        <p:txBody>
-          <a:bodyPr rtlCol="0" anchor="ctr"/>
-          <a:lstStyle/>
-          <a:p>
-            <a:pPr algn="ctr"/>
-            <a:r>
-              <a:rPr lang="en-US" sz="1200" dirty="0"/>
-              <a:t>ICESat-2_ATL08.csv </a:t>
-            </a:r>
-          </a:p>
-        </p:txBody>
-      </p:sp>
-      <p:sp>
-        <p:nvSpPr>
           <p:cNvPr id="3" name="Data 2">
             <a:extLst>
               <a:ext uri="{FF2B5EF4-FFF2-40B4-BE49-F238E27FC236}">
@@ -8863,10 +8497,10 @@
       </p:sp>
       <p:sp>
         <p:nvSpPr>
-          <p:cNvPr id="23" name="Rectangle 22">
-            <a:extLst>
-              <a:ext uri="{FF2B5EF4-FFF2-40B4-BE49-F238E27FC236}">
-                <a16:creationId xmlns:a16="http://schemas.microsoft.com/office/drawing/2014/main" id="{9E077A16-BE04-5F7C-3CBA-3C840BE59E9A}"/>
+          <p:cNvPr id="24" name="Rectangle 23">
+            <a:extLst>
+              <a:ext uri="{FF2B5EF4-FFF2-40B4-BE49-F238E27FC236}">
+                <a16:creationId xmlns:a16="http://schemas.microsoft.com/office/drawing/2014/main" id="{9CC8BF38-79A9-784A-1802-B1AC0F06B42D}"/>
               </a:ext>
             </a:extLst>
           </p:cNvPr>
@@ -8875,7 +8509,7 @@
         </p:nvSpPr>
         <p:spPr>
           <a:xfrm>
-            <a:off x="482122" y="7432437"/>
+            <a:off x="2733689" y="2665987"/>
             <a:ext cx="1731934" cy="430688"/>
           </a:xfrm>
           <a:prstGeom prst="rect">
@@ -8905,22 +8539,17 @@
             <a:pPr algn="ctr"/>
             <a:r>
               <a:rPr lang="en-US" sz="1200" dirty="0"/>
-              <a:t>Export </a:t>
-            </a:r>
-            <a:r>
-              <a:rPr lang="en-US" sz="1200" dirty="0" err="1"/>
-              <a:t>GeoDataFrames</a:t>
-            </a:r>
-            <a:endParaRPr lang="en-US" sz="1200" dirty="0"/>
-          </a:p>
-        </p:txBody>
-      </p:sp>
-      <p:sp>
-        <p:nvSpPr>
-          <p:cNvPr id="24" name="Rectangle 23">
-            <a:extLst>
-              <a:ext uri="{FF2B5EF4-FFF2-40B4-BE49-F238E27FC236}">
-                <a16:creationId xmlns:a16="http://schemas.microsoft.com/office/drawing/2014/main" id="{9CC8BF38-79A9-784A-1802-B1AC0F06B42D}"/>
+              <a:t>Compare Statistics Between Satellites</a:t>
+            </a:r>
+          </a:p>
+        </p:txBody>
+      </p:sp>
+      <p:sp>
+        <p:nvSpPr>
+          <p:cNvPr id="30" name="Rectangle 29">
+            <a:extLst>
+              <a:ext uri="{FF2B5EF4-FFF2-40B4-BE49-F238E27FC236}">
+                <a16:creationId xmlns:a16="http://schemas.microsoft.com/office/drawing/2014/main" id="{DFED7C3A-810D-11A4-A166-F187681687C8}"/>
               </a:ext>
             </a:extLst>
           </p:cNvPr>
@@ -8929,8 +8558,8 @@
         </p:nvSpPr>
         <p:spPr>
           <a:xfrm>
-            <a:off x="2733689" y="2665987"/>
-            <a:ext cx="1731934" cy="430688"/>
+            <a:off x="2725998" y="4947072"/>
+            <a:ext cx="1731934" cy="675861"/>
           </a:xfrm>
           <a:prstGeom prst="rect">
             <a:avLst/>
@@ -8959,207 +8588,6 @@
             <a:pPr algn="ctr"/>
             <a:r>
               <a:rPr lang="en-US" sz="1200" dirty="0"/>
-              <a:t>Compare Statistics Between Satellites</a:t>
-            </a:r>
-          </a:p>
-        </p:txBody>
-      </p:sp>
-      <p:sp>
-        <p:nvSpPr>
-          <p:cNvPr id="25" name="Decision 24">
-            <a:extLst>
-              <a:ext uri="{FF2B5EF4-FFF2-40B4-BE49-F238E27FC236}">
-                <a16:creationId xmlns:a16="http://schemas.microsoft.com/office/drawing/2014/main" id="{567559F7-1E7E-EA7A-3620-F5CE506A0846}"/>
-              </a:ext>
-            </a:extLst>
-          </p:cNvPr>
-          <p:cNvSpPr/>
-          <p:nvPr/>
-        </p:nvSpPr>
-        <p:spPr>
-          <a:xfrm>
-            <a:off x="4962804" y="6214432"/>
-            <a:ext cx="1731934" cy="965220"/>
-          </a:xfrm>
-          <a:prstGeom prst="flowChartDecision">
-            <a:avLst/>
-          </a:prstGeom>
-        </p:spPr>
-        <p:style>
-          <a:lnRef idx="2">
-            <a:schemeClr val="accent2">
-              <a:shade val="15000"/>
-            </a:schemeClr>
-          </a:lnRef>
-          <a:fillRef idx="1">
-            <a:schemeClr val="accent2"/>
-          </a:fillRef>
-          <a:effectRef idx="0">
-            <a:schemeClr val="accent2"/>
-          </a:effectRef>
-          <a:fontRef idx="minor">
-            <a:schemeClr val="lt1"/>
-          </a:fontRef>
-        </p:style>
-        <p:txBody>
-          <a:bodyPr rtlCol="0" anchor="ctr"/>
-          <a:lstStyle/>
-          <a:p>
-            <a:pPr algn="ctr"/>
-            <a:r>
-              <a:rPr lang="en-US" sz="1200" dirty="0"/>
-              <a:t>Shapefile &amp; CSV?</a:t>
-            </a:r>
-          </a:p>
-        </p:txBody>
-      </p:sp>
-      <p:sp>
-        <p:nvSpPr>
-          <p:cNvPr id="27" name="Rectangle 26">
-            <a:extLst>
-              <a:ext uri="{FF2B5EF4-FFF2-40B4-BE49-F238E27FC236}">
-                <a16:creationId xmlns:a16="http://schemas.microsoft.com/office/drawing/2014/main" id="{37CFC955-D4D5-7C3C-F0CA-03340997037F}"/>
-              </a:ext>
-            </a:extLst>
-          </p:cNvPr>
-          <p:cNvSpPr/>
-          <p:nvPr/>
-        </p:nvSpPr>
-        <p:spPr>
-          <a:xfrm>
-            <a:off x="482122" y="6481697"/>
-            <a:ext cx="1731934" cy="430688"/>
-          </a:xfrm>
-          <a:prstGeom prst="rect">
-            <a:avLst/>
-          </a:prstGeom>
-        </p:spPr>
-        <p:style>
-          <a:lnRef idx="2">
-            <a:schemeClr val="accent1">
-              <a:shade val="15000"/>
-            </a:schemeClr>
-          </a:lnRef>
-          <a:fillRef idx="1">
-            <a:schemeClr val="accent1"/>
-          </a:fillRef>
-          <a:effectRef idx="0">
-            <a:schemeClr val="accent1"/>
-          </a:effectRef>
-          <a:fontRef idx="minor">
-            <a:schemeClr val="lt1"/>
-          </a:fontRef>
-        </p:style>
-        <p:txBody>
-          <a:bodyPr rtlCol="0" anchor="ctr"/>
-          <a:lstStyle/>
-          <a:p>
-            <a:pPr algn="ctr"/>
-            <a:r>
-              <a:rPr lang="en-US" sz="1200" dirty="0"/>
-              <a:t>Convert to </a:t>
-            </a:r>
-            <a:r>
-              <a:rPr lang="en-US" sz="1200" dirty="0" err="1"/>
-              <a:t>GeoDataFrame</a:t>
-            </a:r>
-            <a:endParaRPr lang="en-US" sz="1200" dirty="0"/>
-          </a:p>
-        </p:txBody>
-      </p:sp>
-      <p:sp>
-        <p:nvSpPr>
-          <p:cNvPr id="29" name="Decision 28">
-            <a:extLst>
-              <a:ext uri="{FF2B5EF4-FFF2-40B4-BE49-F238E27FC236}">
-                <a16:creationId xmlns:a16="http://schemas.microsoft.com/office/drawing/2014/main" id="{390EA16C-B3B4-809D-978F-BA2AD506A380}"/>
-              </a:ext>
-            </a:extLst>
-          </p:cNvPr>
-          <p:cNvSpPr/>
-          <p:nvPr/>
-        </p:nvSpPr>
-        <p:spPr>
-          <a:xfrm>
-            <a:off x="2733689" y="4939463"/>
-            <a:ext cx="1731934" cy="965220"/>
-          </a:xfrm>
-          <a:prstGeom prst="flowChartDecision">
-            <a:avLst/>
-          </a:prstGeom>
-        </p:spPr>
-        <p:style>
-          <a:lnRef idx="2">
-            <a:schemeClr val="accent2">
-              <a:shade val="15000"/>
-            </a:schemeClr>
-          </a:lnRef>
-          <a:fillRef idx="1">
-            <a:schemeClr val="accent2"/>
-          </a:fillRef>
-          <a:effectRef idx="0">
-            <a:schemeClr val="accent2"/>
-          </a:effectRef>
-          <a:fontRef idx="minor">
-            <a:schemeClr val="lt1"/>
-          </a:fontRef>
-        </p:style>
-        <p:txBody>
-          <a:bodyPr rtlCol="0" anchor="ctr"/>
-          <a:lstStyle/>
-          <a:p>
-            <a:pPr algn="ctr"/>
-            <a:r>
-              <a:rPr lang="en-US" sz="1200" dirty="0"/>
-              <a:t>Shapefile Only?</a:t>
-            </a:r>
-          </a:p>
-        </p:txBody>
-      </p:sp>
-      <p:sp>
-        <p:nvSpPr>
-          <p:cNvPr id="30" name="Rectangle 29">
-            <a:extLst>
-              <a:ext uri="{FF2B5EF4-FFF2-40B4-BE49-F238E27FC236}">
-                <a16:creationId xmlns:a16="http://schemas.microsoft.com/office/drawing/2014/main" id="{DFED7C3A-810D-11A4-A166-F187681687C8}"/>
-              </a:ext>
-            </a:extLst>
-          </p:cNvPr>
-          <p:cNvSpPr/>
-          <p:nvPr/>
-        </p:nvSpPr>
-        <p:spPr>
-          <a:xfrm>
-            <a:off x="4969875" y="7432437"/>
-            <a:ext cx="1731934" cy="430688"/>
-          </a:xfrm>
-          <a:prstGeom prst="rect">
-            <a:avLst/>
-          </a:prstGeom>
-        </p:spPr>
-        <p:style>
-          <a:lnRef idx="2">
-            <a:schemeClr val="accent1">
-              <a:shade val="15000"/>
-            </a:schemeClr>
-          </a:lnRef>
-          <a:fillRef idx="1">
-            <a:schemeClr val="accent1"/>
-          </a:fillRef>
-          <a:effectRef idx="0">
-            <a:schemeClr val="accent1"/>
-          </a:effectRef>
-          <a:fontRef idx="minor">
-            <a:schemeClr val="lt1"/>
-          </a:fontRef>
-        </p:style>
-        <p:txBody>
-          <a:bodyPr rtlCol="0" anchor="ctr"/>
-          <a:lstStyle/>
-          <a:p>
-            <a:pPr algn="ctr"/>
-            <a:r>
-              <a:rPr lang="en-US" sz="1200" dirty="0"/>
               <a:t>Export </a:t>
             </a:r>
             <a:r>
@@ -9168,257 +8596,19 @@
             </a:r>
             <a:endParaRPr lang="en-US" sz="1200" dirty="0"/>
           </a:p>
-        </p:txBody>
-      </p:sp>
-      <p:sp>
-        <p:nvSpPr>
-          <p:cNvPr id="31" name="Oval 30">
-            <a:extLst>
-              <a:ext uri="{FF2B5EF4-FFF2-40B4-BE49-F238E27FC236}">
-                <a16:creationId xmlns:a16="http://schemas.microsoft.com/office/drawing/2014/main" id="{EDFE857C-1D8E-81E3-8470-FD99AD5E0934}"/>
-              </a:ext>
-            </a:extLst>
-          </p:cNvPr>
-          <p:cNvSpPr/>
-          <p:nvPr/>
-        </p:nvSpPr>
-        <p:spPr>
-          <a:xfrm>
-            <a:off x="3901543" y="8755318"/>
-            <a:ext cx="2122515" cy="430688"/>
-          </a:xfrm>
-          <a:prstGeom prst="ellipse">
-            <a:avLst/>
-          </a:prstGeom>
-        </p:spPr>
-        <p:style>
-          <a:lnRef idx="2">
-            <a:schemeClr val="accent6">
-              <a:shade val="15000"/>
-            </a:schemeClr>
-          </a:lnRef>
-          <a:fillRef idx="1">
-            <a:schemeClr val="accent6"/>
-          </a:fillRef>
-          <a:effectRef idx="0">
-            <a:schemeClr val="accent6"/>
-          </a:effectRef>
-          <a:fontRef idx="minor">
-            <a:schemeClr val="lt1"/>
-          </a:fontRef>
-        </p:style>
-        <p:txBody>
-          <a:bodyPr rtlCol="0" anchor="ctr"/>
-          <a:lstStyle/>
           <a:p>
             <a:pPr algn="ctr"/>
             <a:r>
               <a:rPr lang="en-US" sz="1200" dirty="0"/>
-              <a:t>GEDI_L2A.csv </a:t>
-            </a:r>
-          </a:p>
-        </p:txBody>
-      </p:sp>
-      <p:sp>
-        <p:nvSpPr>
-          <p:cNvPr id="32" name="Oval 31">
-            <a:extLst>
-              <a:ext uri="{FF2B5EF4-FFF2-40B4-BE49-F238E27FC236}">
-                <a16:creationId xmlns:a16="http://schemas.microsoft.com/office/drawing/2014/main" id="{4844150C-BCBA-9E15-657B-C4AE5DE20A0D}"/>
-              </a:ext>
-            </a:extLst>
-          </p:cNvPr>
-          <p:cNvSpPr/>
-          <p:nvPr/>
-        </p:nvSpPr>
-        <p:spPr>
-          <a:xfrm>
-            <a:off x="3901542" y="9313220"/>
-            <a:ext cx="2122515" cy="430688"/>
-          </a:xfrm>
-          <a:prstGeom prst="ellipse">
-            <a:avLst/>
-          </a:prstGeom>
-        </p:spPr>
-        <p:style>
-          <a:lnRef idx="2">
-            <a:schemeClr val="accent6">
-              <a:shade val="15000"/>
-            </a:schemeClr>
-          </a:lnRef>
-          <a:fillRef idx="1">
-            <a:schemeClr val="accent6"/>
-          </a:fillRef>
-          <a:effectRef idx="0">
-            <a:schemeClr val="accent6"/>
-          </a:effectRef>
-          <a:fontRef idx="minor">
-            <a:schemeClr val="lt1"/>
-          </a:fontRef>
-        </p:style>
-        <p:txBody>
-          <a:bodyPr rtlCol="0" anchor="ctr"/>
-          <a:lstStyle/>
-          <a:p>
-            <a:pPr algn="ctr"/>
+              <a:t>(csv, </a:t>
+            </a:r>
             <a:r>
               <a:rPr lang="en-US" sz="1200" dirty="0" err="1"/>
-              <a:t>Comparison.csv</a:t>
+              <a:t>shp</a:t>
             </a:r>
             <a:r>
               <a:rPr lang="en-US" sz="1200" dirty="0"/>
-              <a:t> </a:t>
-            </a:r>
-          </a:p>
-        </p:txBody>
-      </p:sp>
-      <p:sp>
-        <p:nvSpPr>
-          <p:cNvPr id="33" name="Oval 32">
-            <a:extLst>
-              <a:ext uri="{FF2B5EF4-FFF2-40B4-BE49-F238E27FC236}">
-                <a16:creationId xmlns:a16="http://schemas.microsoft.com/office/drawing/2014/main" id="{EB7E148D-B480-2CDE-14E9-2A6ED153AA4A}"/>
-              </a:ext>
-            </a:extLst>
-          </p:cNvPr>
-          <p:cNvSpPr/>
-          <p:nvPr/>
-        </p:nvSpPr>
-        <p:spPr>
-          <a:xfrm>
-            <a:off x="1175254" y="9317537"/>
-            <a:ext cx="2167421" cy="430688"/>
-          </a:xfrm>
-          <a:prstGeom prst="ellipse">
-            <a:avLst/>
-          </a:prstGeom>
-        </p:spPr>
-        <p:style>
-          <a:lnRef idx="2">
-            <a:schemeClr val="accent6">
-              <a:shade val="15000"/>
-            </a:schemeClr>
-          </a:lnRef>
-          <a:fillRef idx="1">
-            <a:schemeClr val="accent6"/>
-          </a:fillRef>
-          <a:effectRef idx="0">
-            <a:schemeClr val="accent6"/>
-          </a:effectRef>
-          <a:fontRef idx="minor">
-            <a:schemeClr val="lt1"/>
-          </a:fontRef>
-        </p:style>
-        <p:txBody>
-          <a:bodyPr rtlCol="0" anchor="ctr"/>
-          <a:lstStyle/>
-          <a:p>
-            <a:pPr algn="ctr"/>
-            <a:r>
-              <a:rPr lang="en-US" sz="1200" dirty="0" err="1"/>
-              <a:t>Comparison.shp</a:t>
-            </a:r>
-            <a:r>
-              <a:rPr lang="en-US" sz="1200" dirty="0"/>
-              <a:t> </a:t>
-            </a:r>
-          </a:p>
-        </p:txBody>
-      </p:sp>
-      <p:sp>
-        <p:nvSpPr>
-          <p:cNvPr id="34" name="Oval 33">
-            <a:extLst>
-              <a:ext uri="{FF2B5EF4-FFF2-40B4-BE49-F238E27FC236}">
-                <a16:creationId xmlns:a16="http://schemas.microsoft.com/office/drawing/2014/main" id="{94DEE535-304C-9B53-E7CC-D6D9C4C67356}"/>
-              </a:ext>
-            </a:extLst>
-          </p:cNvPr>
-          <p:cNvSpPr/>
-          <p:nvPr/>
-        </p:nvSpPr>
-        <p:spPr>
-          <a:xfrm>
-            <a:off x="1175255" y="8758284"/>
-            <a:ext cx="2167421" cy="430688"/>
-          </a:xfrm>
-          <a:prstGeom prst="ellipse">
-            <a:avLst/>
-          </a:prstGeom>
-        </p:spPr>
-        <p:style>
-          <a:lnRef idx="2">
-            <a:schemeClr val="accent6">
-              <a:shade val="15000"/>
-            </a:schemeClr>
-          </a:lnRef>
-          <a:fillRef idx="1">
-            <a:schemeClr val="accent6"/>
-          </a:fillRef>
-          <a:effectRef idx="0">
-            <a:schemeClr val="accent6"/>
-          </a:effectRef>
-          <a:fontRef idx="minor">
-            <a:schemeClr val="lt1"/>
-          </a:fontRef>
-        </p:style>
-        <p:txBody>
-          <a:bodyPr rtlCol="0" anchor="ctr"/>
-          <a:lstStyle/>
-          <a:p>
-            <a:pPr algn="ctr"/>
-            <a:r>
-              <a:rPr lang="en-US" sz="1200" dirty="0"/>
-              <a:t>GEDI_L2A.shp</a:t>
-            </a:r>
-          </a:p>
-        </p:txBody>
-      </p:sp>
-      <p:sp>
-        <p:nvSpPr>
-          <p:cNvPr id="35" name="Oval 34">
-            <a:extLst>
-              <a:ext uri="{FF2B5EF4-FFF2-40B4-BE49-F238E27FC236}">
-                <a16:creationId xmlns:a16="http://schemas.microsoft.com/office/drawing/2014/main" id="{4C0EEA70-19B3-21E2-56BE-44B88893B16E}"/>
-              </a:ext>
-            </a:extLst>
-          </p:cNvPr>
-          <p:cNvSpPr/>
-          <p:nvPr/>
-        </p:nvSpPr>
-        <p:spPr>
-          <a:xfrm>
-            <a:off x="1175256" y="8198911"/>
-            <a:ext cx="2167421" cy="430688"/>
-          </a:xfrm>
-          <a:prstGeom prst="ellipse">
-            <a:avLst/>
-          </a:prstGeom>
-        </p:spPr>
-        <p:style>
-          <a:lnRef idx="2">
-            <a:schemeClr val="accent6">
-              <a:shade val="15000"/>
-            </a:schemeClr>
-          </a:lnRef>
-          <a:fillRef idx="1">
-            <a:schemeClr val="accent6"/>
-          </a:fillRef>
-          <a:effectRef idx="0">
-            <a:schemeClr val="accent6"/>
-          </a:effectRef>
-          <a:fontRef idx="minor">
-            <a:schemeClr val="lt1"/>
-          </a:fontRef>
-        </p:style>
-        <p:txBody>
-          <a:bodyPr rtlCol="0" anchor="ctr"/>
-          <a:lstStyle/>
-          <a:p>
-            <a:pPr algn="ctr"/>
-            <a:r>
-              <a:rPr lang="en-US" sz="1200" dirty="0"/>
-              <a:t>ICESat-2_ATL08.shp</a:t>
+              <a:t>, and/or parquet)</a:t>
             </a:r>
           </a:p>
         </p:txBody>
@@ -9814,7 +9004,6 @@
           <p:cNvCxnSpPr>
             <a:cxnSpLocks/>
             <a:stCxn id="22" idx="2"/>
-            <a:endCxn id="29" idx="0"/>
           </p:cNvCxnSpPr>
           <p:nvPr/>
         </p:nvCxnSpPr>
@@ -9825,536 +9014,6 @@
           </a:xfrm>
           <a:prstGeom prst="straightConnector1">
             <a:avLst/>
-          </a:prstGeom>
-          <a:ln>
-            <a:tailEnd type="triangle"/>
-          </a:ln>
-        </p:spPr>
-        <p:style>
-          <a:lnRef idx="2">
-            <a:schemeClr val="accent1"/>
-          </a:lnRef>
-          <a:fillRef idx="0">
-            <a:schemeClr val="accent1"/>
-          </a:fillRef>
-          <a:effectRef idx="1">
-            <a:schemeClr val="accent1"/>
-          </a:effectRef>
-          <a:fontRef idx="minor">
-            <a:schemeClr val="tx1"/>
-          </a:fontRef>
-        </p:style>
-      </p:cxnSp>
-      <p:cxnSp>
-        <p:nvCxnSpPr>
-          <p:cNvPr id="62" name="Elbow Connector 61">
-            <a:extLst>
-              <a:ext uri="{FF2B5EF4-FFF2-40B4-BE49-F238E27FC236}">
-                <a16:creationId xmlns:a16="http://schemas.microsoft.com/office/drawing/2014/main" id="{E785B8B7-F52D-9729-607A-CBA0EEBA7F83}"/>
-              </a:ext>
-            </a:extLst>
-          </p:cNvPr>
-          <p:cNvCxnSpPr>
-            <a:cxnSpLocks/>
-            <a:stCxn id="29" idx="3"/>
-            <a:endCxn id="25" idx="0"/>
-          </p:cNvCxnSpPr>
-          <p:nvPr/>
-        </p:nvCxnSpPr>
-        <p:spPr>
-          <a:xfrm>
-            <a:off x="4465623" y="5422073"/>
-            <a:ext cx="1363148" cy="792359"/>
-          </a:xfrm>
-          <a:prstGeom prst="bentConnector2">
-            <a:avLst/>
-          </a:prstGeom>
-          <a:ln>
-            <a:tailEnd type="triangle"/>
-          </a:ln>
-        </p:spPr>
-        <p:style>
-          <a:lnRef idx="2">
-            <a:schemeClr val="accent1"/>
-          </a:lnRef>
-          <a:fillRef idx="0">
-            <a:schemeClr val="accent1"/>
-          </a:fillRef>
-          <a:effectRef idx="1">
-            <a:schemeClr val="accent1"/>
-          </a:effectRef>
-          <a:fontRef idx="minor">
-            <a:schemeClr val="tx1"/>
-          </a:fontRef>
-        </p:style>
-      </p:cxnSp>
-      <p:cxnSp>
-        <p:nvCxnSpPr>
-          <p:cNvPr id="64" name="Elbow Connector 63">
-            <a:extLst>
-              <a:ext uri="{FF2B5EF4-FFF2-40B4-BE49-F238E27FC236}">
-                <a16:creationId xmlns:a16="http://schemas.microsoft.com/office/drawing/2014/main" id="{6149F67D-618E-CBC5-1C77-49CA61BEC5FE}"/>
-              </a:ext>
-            </a:extLst>
-          </p:cNvPr>
-          <p:cNvCxnSpPr>
-            <a:cxnSpLocks/>
-            <a:stCxn id="29" idx="1"/>
-            <a:endCxn id="27" idx="0"/>
-          </p:cNvCxnSpPr>
-          <p:nvPr/>
-        </p:nvCxnSpPr>
-        <p:spPr>
-          <a:xfrm rot="10800000" flipV="1">
-            <a:off x="1348089" y="5422073"/>
-            <a:ext cx="1385600" cy="1059624"/>
-          </a:xfrm>
-          <a:prstGeom prst="bentConnector2">
-            <a:avLst/>
-          </a:prstGeom>
-          <a:ln>
-            <a:tailEnd type="triangle"/>
-          </a:ln>
-        </p:spPr>
-        <p:style>
-          <a:lnRef idx="2">
-            <a:schemeClr val="accent1"/>
-          </a:lnRef>
-          <a:fillRef idx="0">
-            <a:schemeClr val="accent1"/>
-          </a:fillRef>
-          <a:effectRef idx="1">
-            <a:schemeClr val="accent1"/>
-          </a:effectRef>
-          <a:fontRef idx="minor">
-            <a:schemeClr val="tx1"/>
-          </a:fontRef>
-        </p:style>
-      </p:cxnSp>
-      <p:cxnSp>
-        <p:nvCxnSpPr>
-          <p:cNvPr id="68" name="Straight Arrow Connector 67">
-            <a:extLst>
-              <a:ext uri="{FF2B5EF4-FFF2-40B4-BE49-F238E27FC236}">
-                <a16:creationId xmlns:a16="http://schemas.microsoft.com/office/drawing/2014/main" id="{C8999EBC-2A8E-91E5-6940-42AF25391E7B}"/>
-              </a:ext>
-            </a:extLst>
-          </p:cNvPr>
-          <p:cNvCxnSpPr>
-            <a:stCxn id="27" idx="2"/>
-            <a:endCxn id="23" idx="0"/>
-          </p:cNvCxnSpPr>
-          <p:nvPr/>
-        </p:nvCxnSpPr>
-        <p:spPr>
-          <a:xfrm>
-            <a:off x="1348089" y="6912385"/>
-            <a:ext cx="0" cy="520052"/>
-          </a:xfrm>
-          <a:prstGeom prst="straightConnector1">
-            <a:avLst/>
-          </a:prstGeom>
-          <a:ln>
-            <a:tailEnd type="triangle"/>
-          </a:ln>
-        </p:spPr>
-        <p:style>
-          <a:lnRef idx="2">
-            <a:schemeClr val="accent1"/>
-          </a:lnRef>
-          <a:fillRef idx="0">
-            <a:schemeClr val="accent1"/>
-          </a:fillRef>
-          <a:effectRef idx="1">
-            <a:schemeClr val="accent1"/>
-          </a:effectRef>
-          <a:fontRef idx="minor">
-            <a:schemeClr val="tx1"/>
-          </a:fontRef>
-        </p:style>
-      </p:cxnSp>
-      <p:cxnSp>
-        <p:nvCxnSpPr>
-          <p:cNvPr id="70" name="Elbow Connector 69">
-            <a:extLst>
-              <a:ext uri="{FF2B5EF4-FFF2-40B4-BE49-F238E27FC236}">
-                <a16:creationId xmlns:a16="http://schemas.microsoft.com/office/drawing/2014/main" id="{BF071E29-0157-9CAB-A7F7-94E007ADDF1F}"/>
-              </a:ext>
-            </a:extLst>
-          </p:cNvPr>
-          <p:cNvCxnSpPr>
-            <a:stCxn id="23" idx="2"/>
-            <a:endCxn id="35" idx="2"/>
-          </p:cNvCxnSpPr>
-          <p:nvPr/>
-        </p:nvCxnSpPr>
-        <p:spPr>
-          <a:xfrm rot="5400000">
-            <a:off x="986108" y="8052274"/>
-            <a:ext cx="551130" cy="172833"/>
-          </a:xfrm>
-          <a:prstGeom prst="bentConnector4">
-            <a:avLst>
-              <a:gd name="adj1" fmla="val 30463"/>
-              <a:gd name="adj2" fmla="val 296009"/>
-            </a:avLst>
-          </a:prstGeom>
-          <a:ln>
-            <a:tailEnd type="triangle"/>
-          </a:ln>
-        </p:spPr>
-        <p:style>
-          <a:lnRef idx="2">
-            <a:schemeClr val="accent1"/>
-          </a:lnRef>
-          <a:fillRef idx="0">
-            <a:schemeClr val="accent1"/>
-          </a:fillRef>
-          <a:effectRef idx="1">
-            <a:schemeClr val="accent1"/>
-          </a:effectRef>
-          <a:fontRef idx="minor">
-            <a:schemeClr val="tx1"/>
-          </a:fontRef>
-        </p:style>
-      </p:cxnSp>
-      <p:cxnSp>
-        <p:nvCxnSpPr>
-          <p:cNvPr id="72" name="Elbow Connector 71">
-            <a:extLst>
-              <a:ext uri="{FF2B5EF4-FFF2-40B4-BE49-F238E27FC236}">
-                <a16:creationId xmlns:a16="http://schemas.microsoft.com/office/drawing/2014/main" id="{296E0DA4-6EA2-B3DA-E7B9-3F0C6AA9E07B}"/>
-              </a:ext>
-            </a:extLst>
-          </p:cNvPr>
-          <p:cNvCxnSpPr>
-            <a:stCxn id="23" idx="2"/>
-            <a:endCxn id="34" idx="2"/>
-          </p:cNvCxnSpPr>
-          <p:nvPr/>
-        </p:nvCxnSpPr>
-        <p:spPr>
-          <a:xfrm rot="5400000">
-            <a:off x="706421" y="8331959"/>
-            <a:ext cx="1110503" cy="172834"/>
-          </a:xfrm>
-          <a:prstGeom prst="bentConnector4">
-            <a:avLst>
-              <a:gd name="adj1" fmla="val 15503"/>
-              <a:gd name="adj2" fmla="val 296009"/>
-            </a:avLst>
-          </a:prstGeom>
-          <a:ln>
-            <a:tailEnd type="triangle"/>
-          </a:ln>
-        </p:spPr>
-        <p:style>
-          <a:lnRef idx="2">
-            <a:schemeClr val="accent1"/>
-          </a:lnRef>
-          <a:fillRef idx="0">
-            <a:schemeClr val="accent1"/>
-          </a:fillRef>
-          <a:effectRef idx="1">
-            <a:schemeClr val="accent1"/>
-          </a:effectRef>
-          <a:fontRef idx="minor">
-            <a:schemeClr val="tx1"/>
-          </a:fontRef>
-        </p:style>
-      </p:cxnSp>
-      <p:cxnSp>
-        <p:nvCxnSpPr>
-          <p:cNvPr id="74" name="Elbow Connector 73">
-            <a:extLst>
-              <a:ext uri="{FF2B5EF4-FFF2-40B4-BE49-F238E27FC236}">
-                <a16:creationId xmlns:a16="http://schemas.microsoft.com/office/drawing/2014/main" id="{F330BD58-EF56-B27F-12D8-C80C09C3861C}"/>
-              </a:ext>
-            </a:extLst>
-          </p:cNvPr>
-          <p:cNvCxnSpPr>
-            <a:stCxn id="23" idx="2"/>
-            <a:endCxn id="33" idx="2"/>
-          </p:cNvCxnSpPr>
-          <p:nvPr/>
-        </p:nvCxnSpPr>
-        <p:spPr>
-          <a:xfrm rot="5400000">
-            <a:off x="426794" y="8611586"/>
-            <a:ext cx="1669756" cy="172835"/>
-          </a:xfrm>
-          <a:prstGeom prst="bentConnector4">
-            <a:avLst>
-              <a:gd name="adj1" fmla="val 10233"/>
-              <a:gd name="adj2" fmla="val 296007"/>
-            </a:avLst>
-          </a:prstGeom>
-          <a:ln>
-            <a:tailEnd type="triangle"/>
-          </a:ln>
-        </p:spPr>
-        <p:style>
-          <a:lnRef idx="2">
-            <a:schemeClr val="accent1"/>
-          </a:lnRef>
-          <a:fillRef idx="0">
-            <a:schemeClr val="accent1"/>
-          </a:fillRef>
-          <a:effectRef idx="1">
-            <a:schemeClr val="accent1"/>
-          </a:effectRef>
-          <a:fontRef idx="minor">
-            <a:schemeClr val="tx1"/>
-          </a:fontRef>
-        </p:style>
-      </p:cxnSp>
-      <p:cxnSp>
-        <p:nvCxnSpPr>
-          <p:cNvPr id="76" name="Elbow Connector 75">
-            <a:extLst>
-              <a:ext uri="{FF2B5EF4-FFF2-40B4-BE49-F238E27FC236}">
-                <a16:creationId xmlns:a16="http://schemas.microsoft.com/office/drawing/2014/main" id="{C361E9E7-1878-32BD-9892-A1304631A57E}"/>
-              </a:ext>
-            </a:extLst>
-          </p:cNvPr>
-          <p:cNvCxnSpPr>
-            <a:stCxn id="30" idx="2"/>
-            <a:endCxn id="8" idx="6"/>
-          </p:cNvCxnSpPr>
-          <p:nvPr/>
-        </p:nvCxnSpPr>
-        <p:spPr>
-          <a:xfrm rot="16200000" flipH="1">
-            <a:off x="5655133" y="8043833"/>
-            <a:ext cx="549635" cy="188217"/>
-          </a:xfrm>
-          <a:prstGeom prst="bentConnector4">
-            <a:avLst>
-              <a:gd name="adj1" fmla="val 30410"/>
-              <a:gd name="adj2" fmla="val 285955"/>
-            </a:avLst>
-          </a:prstGeom>
-          <a:ln>
-            <a:tailEnd type="triangle"/>
-          </a:ln>
-        </p:spPr>
-        <p:style>
-          <a:lnRef idx="2">
-            <a:schemeClr val="accent1"/>
-          </a:lnRef>
-          <a:fillRef idx="0">
-            <a:schemeClr val="accent1"/>
-          </a:fillRef>
-          <a:effectRef idx="1">
-            <a:schemeClr val="accent1"/>
-          </a:effectRef>
-          <a:fontRef idx="minor">
-            <a:schemeClr val="tx1"/>
-          </a:fontRef>
-        </p:style>
-      </p:cxnSp>
-      <p:cxnSp>
-        <p:nvCxnSpPr>
-          <p:cNvPr id="78" name="Elbow Connector 77">
-            <a:extLst>
-              <a:ext uri="{FF2B5EF4-FFF2-40B4-BE49-F238E27FC236}">
-                <a16:creationId xmlns:a16="http://schemas.microsoft.com/office/drawing/2014/main" id="{14DB6972-CAD2-FBA1-90FE-5FD124CEBCC3}"/>
-              </a:ext>
-            </a:extLst>
-          </p:cNvPr>
-          <p:cNvCxnSpPr>
-            <a:stCxn id="30" idx="2"/>
-            <a:endCxn id="31" idx="6"/>
-          </p:cNvCxnSpPr>
-          <p:nvPr/>
-        </p:nvCxnSpPr>
-        <p:spPr>
-          <a:xfrm rot="16200000" flipH="1">
-            <a:off x="5376182" y="8322785"/>
-            <a:ext cx="1107537" cy="188216"/>
-          </a:xfrm>
-          <a:prstGeom prst="bentConnector4">
-            <a:avLst>
-              <a:gd name="adj1" fmla="val 15410"/>
-              <a:gd name="adj2" fmla="val 285955"/>
-            </a:avLst>
-          </a:prstGeom>
-          <a:ln>
-            <a:tailEnd type="triangle"/>
-          </a:ln>
-        </p:spPr>
-        <p:style>
-          <a:lnRef idx="2">
-            <a:schemeClr val="accent1"/>
-          </a:lnRef>
-          <a:fillRef idx="0">
-            <a:schemeClr val="accent1"/>
-          </a:fillRef>
-          <a:effectRef idx="1">
-            <a:schemeClr val="accent1"/>
-          </a:effectRef>
-          <a:fontRef idx="minor">
-            <a:schemeClr val="tx1"/>
-          </a:fontRef>
-        </p:style>
-      </p:cxnSp>
-      <p:cxnSp>
-        <p:nvCxnSpPr>
-          <p:cNvPr id="80" name="Elbow Connector 79">
-            <a:extLst>
-              <a:ext uri="{FF2B5EF4-FFF2-40B4-BE49-F238E27FC236}">
-                <a16:creationId xmlns:a16="http://schemas.microsoft.com/office/drawing/2014/main" id="{3FD49C13-34F2-1A10-FC4B-6EBD3BF367ED}"/>
-              </a:ext>
-            </a:extLst>
-          </p:cNvPr>
-          <p:cNvCxnSpPr>
-            <a:stCxn id="30" idx="2"/>
-            <a:endCxn id="32" idx="6"/>
-          </p:cNvCxnSpPr>
-          <p:nvPr/>
-        </p:nvCxnSpPr>
-        <p:spPr>
-          <a:xfrm rot="16200000" flipH="1">
-            <a:off x="5097230" y="8601736"/>
-            <a:ext cx="1665439" cy="188215"/>
-          </a:xfrm>
-          <a:prstGeom prst="bentConnector4">
-            <a:avLst>
-              <a:gd name="adj1" fmla="val 10129"/>
-              <a:gd name="adj2" fmla="val 285957"/>
-            </a:avLst>
-          </a:prstGeom>
-          <a:ln>
-            <a:tailEnd type="triangle"/>
-          </a:ln>
-        </p:spPr>
-        <p:style>
-          <a:lnRef idx="2">
-            <a:schemeClr val="accent1"/>
-          </a:lnRef>
-          <a:fillRef idx="0">
-            <a:schemeClr val="accent1"/>
-          </a:fillRef>
-          <a:effectRef idx="1">
-            <a:schemeClr val="accent1"/>
-          </a:effectRef>
-          <a:fontRef idx="minor">
-            <a:schemeClr val="tx1"/>
-          </a:fontRef>
-        </p:style>
-      </p:cxnSp>
-      <p:cxnSp>
-        <p:nvCxnSpPr>
-          <p:cNvPr id="82" name="Straight Arrow Connector 81">
-            <a:extLst>
-              <a:ext uri="{FF2B5EF4-FFF2-40B4-BE49-F238E27FC236}">
-                <a16:creationId xmlns:a16="http://schemas.microsoft.com/office/drawing/2014/main" id="{EDF54DEF-D7F4-768D-287D-7C81EA9FB9D0}"/>
-              </a:ext>
-            </a:extLst>
-          </p:cNvPr>
-          <p:cNvCxnSpPr>
-            <a:stCxn id="25" idx="2"/>
-            <a:endCxn id="30" idx="0"/>
-          </p:cNvCxnSpPr>
-          <p:nvPr/>
-        </p:nvCxnSpPr>
-        <p:spPr>
-          <a:xfrm>
-            <a:off x="5828771" y="7179652"/>
-            <a:ext cx="7071" cy="252785"/>
-          </a:xfrm>
-          <a:prstGeom prst="straightConnector1">
-            <a:avLst/>
-          </a:prstGeom>
-          <a:ln>
-            <a:tailEnd type="triangle"/>
-          </a:ln>
-        </p:spPr>
-        <p:style>
-          <a:lnRef idx="2">
-            <a:schemeClr val="accent1"/>
-          </a:lnRef>
-          <a:fillRef idx="0">
-            <a:schemeClr val="accent1"/>
-          </a:fillRef>
-          <a:effectRef idx="1">
-            <a:schemeClr val="accent1"/>
-          </a:effectRef>
-          <a:fontRef idx="minor">
-            <a:schemeClr val="tx1"/>
-          </a:fontRef>
-        </p:style>
-      </p:cxnSp>
-      <p:cxnSp>
-        <p:nvCxnSpPr>
-          <p:cNvPr id="88" name="Elbow Connector 87">
-            <a:extLst>
-              <a:ext uri="{FF2B5EF4-FFF2-40B4-BE49-F238E27FC236}">
-                <a16:creationId xmlns:a16="http://schemas.microsoft.com/office/drawing/2014/main" id="{29A9C898-E883-32CE-D450-D91C812CDE8E}"/>
-              </a:ext>
-            </a:extLst>
-          </p:cNvPr>
-          <p:cNvCxnSpPr>
-            <a:cxnSpLocks/>
-            <a:stCxn id="25" idx="1"/>
-            <a:endCxn id="30" idx="1"/>
-          </p:cNvCxnSpPr>
-          <p:nvPr/>
-        </p:nvCxnSpPr>
-        <p:spPr>
-          <a:xfrm rot="10800000" flipH="1" flipV="1">
-            <a:off x="4962803" y="6697041"/>
-            <a:ext cx="7071" cy="950739"/>
-          </a:xfrm>
-          <a:prstGeom prst="bentConnector3">
-            <a:avLst>
-              <a:gd name="adj1" fmla="val -7590341"/>
-            </a:avLst>
-          </a:prstGeom>
-          <a:ln>
-            <a:tailEnd type="triangle"/>
-          </a:ln>
-        </p:spPr>
-        <p:style>
-          <a:lnRef idx="2">
-            <a:schemeClr val="accent1"/>
-          </a:lnRef>
-          <a:fillRef idx="0">
-            <a:schemeClr val="accent1"/>
-          </a:fillRef>
-          <a:effectRef idx="1">
-            <a:schemeClr val="accent1"/>
-          </a:effectRef>
-          <a:fontRef idx="minor">
-            <a:schemeClr val="tx1"/>
-          </a:fontRef>
-        </p:style>
-      </p:cxnSp>
-      <p:cxnSp>
-        <p:nvCxnSpPr>
-          <p:cNvPr id="92" name="Elbow Connector 91">
-            <a:extLst>
-              <a:ext uri="{FF2B5EF4-FFF2-40B4-BE49-F238E27FC236}">
-                <a16:creationId xmlns:a16="http://schemas.microsoft.com/office/drawing/2014/main" id="{D5D2D087-6181-A661-F747-64B9B0C918E1}"/>
-              </a:ext>
-            </a:extLst>
-          </p:cNvPr>
-          <p:cNvCxnSpPr>
-            <a:cxnSpLocks/>
-            <a:stCxn id="25" idx="1"/>
-            <a:endCxn id="27" idx="3"/>
-          </p:cNvCxnSpPr>
-          <p:nvPr/>
-        </p:nvCxnSpPr>
-        <p:spPr>
-          <a:xfrm rot="10800000">
-            <a:off x="2214056" y="6697042"/>
-            <a:ext cx="2748748" cy="1"/>
-          </a:xfrm>
-          <a:prstGeom prst="bentConnector3">
-            <a:avLst>
-              <a:gd name="adj1" fmla="val 50000"/>
-            </a:avLst>
           </a:prstGeom>
           <a:ln>
             <a:tailEnd type="triangle"/>
@@ -10523,146 +9182,6 @@
       </p:cxnSp>
       <p:sp>
         <p:nvSpPr>
-          <p:cNvPr id="2" name="TextBox 1">
-            <a:extLst>
-              <a:ext uri="{FF2B5EF4-FFF2-40B4-BE49-F238E27FC236}">
-                <a16:creationId xmlns:a16="http://schemas.microsoft.com/office/drawing/2014/main" id="{067FC516-4D6E-8824-C485-8F387513E34C}"/>
-              </a:ext>
-            </a:extLst>
-          </p:cNvPr>
-          <p:cNvSpPr txBox="1"/>
-          <p:nvPr/>
-        </p:nvSpPr>
-        <p:spPr>
-          <a:xfrm>
-            <a:off x="2262598" y="5168759"/>
-            <a:ext cx="471091" cy="276999"/>
-          </a:xfrm>
-          <a:prstGeom prst="rect">
-            <a:avLst/>
-          </a:prstGeom>
-          <a:noFill/>
-        </p:spPr>
-        <p:txBody>
-          <a:bodyPr wrap="none" rtlCol="0">
-            <a:spAutoFit/>
-          </a:bodyPr>
-          <a:lstStyle/>
-          <a:p>
-            <a:r>
-              <a:rPr lang="en-US" sz="1200" dirty="0"/>
-              <a:t>True</a:t>
-            </a:r>
-          </a:p>
-        </p:txBody>
-      </p:sp>
-      <p:sp>
-        <p:nvSpPr>
-          <p:cNvPr id="10" name="TextBox 9">
-            <a:extLst>
-              <a:ext uri="{FF2B5EF4-FFF2-40B4-BE49-F238E27FC236}">
-                <a16:creationId xmlns:a16="http://schemas.microsoft.com/office/drawing/2014/main" id="{B0E662C2-70B5-C5AF-1463-68268061E1E7}"/>
-              </a:ext>
-            </a:extLst>
-          </p:cNvPr>
-          <p:cNvSpPr txBox="1"/>
-          <p:nvPr/>
-        </p:nvSpPr>
-        <p:spPr>
-          <a:xfrm>
-            <a:off x="4457932" y="6432242"/>
-            <a:ext cx="471091" cy="276999"/>
-          </a:xfrm>
-          <a:prstGeom prst="rect">
-            <a:avLst/>
-          </a:prstGeom>
-          <a:noFill/>
-        </p:spPr>
-        <p:txBody>
-          <a:bodyPr wrap="none" rtlCol="0">
-            <a:spAutoFit/>
-          </a:bodyPr>
-          <a:lstStyle/>
-          <a:p>
-            <a:r>
-              <a:rPr lang="en-US" sz="1200" dirty="0"/>
-              <a:t>True</a:t>
-            </a:r>
-          </a:p>
-        </p:txBody>
-      </p:sp>
-      <p:sp>
-        <p:nvSpPr>
-          <p:cNvPr id="11" name="TextBox 10">
-            <a:extLst>
-              <a:ext uri="{FF2B5EF4-FFF2-40B4-BE49-F238E27FC236}">
-                <a16:creationId xmlns:a16="http://schemas.microsoft.com/office/drawing/2014/main" id="{F2F10403-F9C4-EC6C-647C-100D2E5058A7}"/>
-              </a:ext>
-            </a:extLst>
-          </p:cNvPr>
-          <p:cNvSpPr txBox="1"/>
-          <p:nvPr/>
-        </p:nvSpPr>
-        <p:spPr>
-          <a:xfrm>
-            <a:off x="4457932" y="5163426"/>
-            <a:ext cx="541880" cy="276999"/>
-          </a:xfrm>
-          <a:prstGeom prst="rect">
-            <a:avLst/>
-          </a:prstGeom>
-          <a:noFill/>
-        </p:spPr>
-        <p:txBody>
-          <a:bodyPr wrap="none" rtlCol="0">
-            <a:spAutoFit/>
-          </a:bodyPr>
-          <a:lstStyle/>
-          <a:p>
-            <a:r>
-              <a:rPr lang="en-US" sz="1200" dirty="0"/>
-              <a:t>False</a:t>
-            </a:r>
-          </a:p>
-        </p:txBody>
-      </p:sp>
-      <p:sp>
-        <p:nvSpPr>
-          <p:cNvPr id="12" name="TextBox 11">
-            <a:extLst>
-              <a:ext uri="{FF2B5EF4-FFF2-40B4-BE49-F238E27FC236}">
-                <a16:creationId xmlns:a16="http://schemas.microsoft.com/office/drawing/2014/main" id="{F9611314-D0F0-E79A-A5D2-2DB22243E609}"/>
-              </a:ext>
-            </a:extLst>
-          </p:cNvPr>
-          <p:cNvSpPr txBox="1"/>
-          <p:nvPr/>
-        </p:nvSpPr>
-        <p:spPr>
-          <a:xfrm>
-            <a:off x="5817013" y="7148825"/>
-            <a:ext cx="541880" cy="276999"/>
-          </a:xfrm>
-          <a:prstGeom prst="rect">
-            <a:avLst/>
-          </a:prstGeom>
-          <a:noFill/>
-        </p:spPr>
-        <p:txBody>
-          <a:bodyPr wrap="none" rtlCol="0">
-            <a:spAutoFit/>
-          </a:bodyPr>
-          <a:lstStyle/>
-          <a:p>
-            <a:r>
-              <a:rPr lang="en-US" sz="1200" dirty="0"/>
-              <a:t>False</a:t>
-            </a:r>
-          </a:p>
-        </p:txBody>
-      </p:sp>
-      <p:sp>
-        <p:nvSpPr>
           <p:cNvPr id="14" name="Oval 13">
             <a:extLst>
               <a:ext uri="{FF2B5EF4-FFF2-40B4-BE49-F238E27FC236}">
@@ -10675,7 +9194,7 @@
         </p:nvSpPr>
         <p:spPr>
           <a:xfrm>
-            <a:off x="2427379" y="9936884"/>
+            <a:off x="2399261" y="6082120"/>
             <a:ext cx="2400789" cy="689234"/>
           </a:xfrm>
           <a:prstGeom prst="ellipse">
@@ -10712,72 +9231,27 @@
       </p:sp>
       <p:cxnSp>
         <p:nvCxnSpPr>
-          <p:cNvPr id="16" name="Elbow Connector 15">
-            <a:extLst>
-              <a:ext uri="{FF2B5EF4-FFF2-40B4-BE49-F238E27FC236}">
-                <a16:creationId xmlns:a16="http://schemas.microsoft.com/office/drawing/2014/main" id="{9E808B6B-0690-E2D8-C813-97F241087678}"/>
+          <p:cNvPr id="42" name="Straight Arrow Connector 41">
+            <a:extLst>
+              <a:ext uri="{FF2B5EF4-FFF2-40B4-BE49-F238E27FC236}">
+                <a16:creationId xmlns:a16="http://schemas.microsoft.com/office/drawing/2014/main" id="{B59E894C-3FF8-F10A-26C9-57E5944D14D6}"/>
               </a:ext>
             </a:extLst>
           </p:cNvPr>
           <p:cNvCxnSpPr>
             <a:cxnSpLocks/>
-            <a:endCxn id="14" idx="6"/>
+            <a:stCxn id="30" idx="2"/>
+            <a:endCxn id="14" idx="0"/>
           </p:cNvCxnSpPr>
           <p:nvPr/>
         </p:nvCxnSpPr>
         <p:spPr>
-          <a:xfrm rot="10800000" flipV="1">
-            <a:off x="4828169" y="9528563"/>
-            <a:ext cx="1530725" cy="752938"/>
-          </a:xfrm>
-          <a:prstGeom prst="bentConnector3">
-            <a:avLst>
-              <a:gd name="adj1" fmla="val -646"/>
-            </a:avLst>
-          </a:prstGeom>
-          <a:ln>
-            <a:tailEnd type="triangle"/>
-          </a:ln>
-        </p:spPr>
-        <p:style>
-          <a:lnRef idx="2">
-            <a:schemeClr val="accent1"/>
-          </a:lnRef>
-          <a:fillRef idx="0">
-            <a:schemeClr val="accent1"/>
-          </a:fillRef>
-          <a:effectRef idx="1">
-            <a:schemeClr val="accent1"/>
-          </a:effectRef>
-          <a:fontRef idx="minor">
-            <a:schemeClr val="tx1"/>
-          </a:fontRef>
-        </p:style>
-      </p:cxnSp>
-      <p:cxnSp>
-        <p:nvCxnSpPr>
-          <p:cNvPr id="36" name="Elbow Connector 35">
-            <a:extLst>
-              <a:ext uri="{FF2B5EF4-FFF2-40B4-BE49-F238E27FC236}">
-                <a16:creationId xmlns:a16="http://schemas.microsoft.com/office/drawing/2014/main" id="{271FFB7C-9EC2-B2E7-BB13-645B34795DD0}"/>
-              </a:ext>
-            </a:extLst>
-          </p:cNvPr>
-          <p:cNvCxnSpPr>
-            <a:cxnSpLocks/>
-            <a:endCxn id="14" idx="2"/>
-          </p:cNvCxnSpPr>
-          <p:nvPr/>
-        </p:nvCxnSpPr>
-        <p:spPr>
-          <a:xfrm>
-            <a:off x="840417" y="9539748"/>
-            <a:ext cx="1586962" cy="741753"/>
-          </a:xfrm>
-          <a:prstGeom prst="bentConnector3">
-            <a:avLst>
-              <a:gd name="adj1" fmla="val -104"/>
-            </a:avLst>
+          <a:xfrm>
+            <a:off x="3591965" y="5622933"/>
+            <a:ext cx="7691" cy="459187"/>
+          </a:xfrm>
+          <a:prstGeom prst="straightConnector1">
+            <a:avLst/>
           </a:prstGeom>
           <a:ln>
             <a:tailEnd type="triangle"/>
